--- a/el_nino_exposure_chart.pptx
+++ b/el_nino_exposure_chart.pptx
@@ -3090,27 +3090,94 @@
       <p:grpSpPr/>
       <p:sp>
         <p:nvSpPr>
-          <p:cNvPr id="2" name="Rectangle 1"/>
+          <p:cNvPr id="2" name="TextBox 1"/>
+          <p:cNvSpPr txBox="1"/>
+          <p:nvPr/>
+        </p:nvSpPr>
+        <p:spPr>
+          <a:xfrm>
+            <a:off x="502920" y="320040"/>
+            <a:ext cx="10515600" cy="502920"/>
+          </a:xfrm>
+          <a:prstGeom prst="rect">
+            <a:avLst/>
+          </a:prstGeom>
+          <a:noFill/>
+        </p:spPr>
+        <p:txBody>
+          <a:bodyPr wrap="square" lIns="0" rIns="0" tIns="0" bIns="0" anchor="t">
+            <a:spAutoFit/>
+          </a:bodyPr>
+          <a:lstStyle/>
+          <a:p>
+            <a:pPr algn="l"/>
+            <a:r>
+              <a:rPr sz="2800" b="1" i="0">
+                <a:solidFill>
+                  <a:srgbClr val="1E2761"/>
+                </a:solidFill>
+                <a:latin typeface="Cambria"/>
+              </a:rPr>
+              <a:t>Latin America: El Nino Exposure vs. Fiscal Fragility</a:t>
+            </a:r>
+          </a:p>
+        </p:txBody>
+      </p:sp>
+      <p:sp>
+        <p:nvSpPr>
+          <p:cNvPr id="3" name="TextBox 2"/>
+          <p:cNvSpPr txBox="1"/>
+          <p:nvPr/>
+        </p:nvSpPr>
+        <p:spPr>
+          <a:xfrm>
+            <a:off x="521207" y="868680"/>
+            <a:ext cx="10515600" cy="365760"/>
+          </a:xfrm>
+          <a:prstGeom prst="rect">
+            <a:avLst/>
+          </a:prstGeom>
+          <a:noFill/>
+        </p:spPr>
+        <p:txBody>
+          <a:bodyPr wrap="square" lIns="0" rIns="0" tIns="0" bIns="0" anchor="t">
+            <a:spAutoFit/>
+          </a:bodyPr>
+          <a:lstStyle/>
+          <a:p>
+            <a:pPr algn="l"/>
+            <a:r>
+              <a:rPr sz="1300" b="0" i="1">
+                <a:solidFill>
+                  <a:srgbClr val="6B7280"/>
+                </a:solidFill>
+                <a:latin typeface="Calibri"/>
+              </a:rPr>
+              <a:t>Bubble color = overall El Nino-relevant risk (green low -&gt; red high)</a:t>
+            </a:r>
+          </a:p>
+        </p:txBody>
+      </p:sp>
+      <p:sp>
+        <p:nvSpPr>
+          <p:cNvPr id="4" name="Rectangle 3"/>
           <p:cNvSpPr/>
           <p:nvPr/>
         </p:nvSpPr>
         <p:spPr>
           <a:xfrm>
-            <a:off x="6400799" y="868680"/>
-            <a:ext cx="4983481" cy="2514600"/>
+            <a:off x="4526279" y="1417320"/>
+            <a:ext cx="3474720" cy="2286000"/>
           </a:xfrm>
           <a:prstGeom prst="rect">
             <a:avLst/>
           </a:prstGeom>
           <a:solidFill>
-            <a:srgbClr val="C8102E">
-              <a:alpha val="6000"/>
-            </a:srgbClr>
+            <a:srgbClr val="FBECEC"/>
           </a:solidFill>
           <a:ln>
             <a:noFill/>
           </a:ln>
-          <a:effectLst/>
         </p:spPr>
         <p:style>
           <a:lnRef idx="1">
@@ -3136,27 +3203,24 @@
       </p:sp>
       <p:sp>
         <p:nvSpPr>
-          <p:cNvPr id="3" name="Rectangle 2"/>
+          <p:cNvPr id="5" name="Rectangle 4"/>
           <p:cNvSpPr/>
           <p:nvPr/>
         </p:nvSpPr>
         <p:spPr>
           <a:xfrm>
-            <a:off x="1417320" y="3383280"/>
-            <a:ext cx="4983479" cy="2514600"/>
+            <a:off x="1051560" y="3703320"/>
+            <a:ext cx="3474719" cy="2286000"/>
           </a:xfrm>
           <a:prstGeom prst="rect">
             <a:avLst/>
           </a:prstGeom>
           <a:solidFill>
-            <a:srgbClr val="2E8B57">
-              <a:alpha val="6000"/>
-            </a:srgbClr>
+            <a:srgbClr val="EDF5EF"/>
           </a:solidFill>
           <a:ln>
             <a:noFill/>
           </a:ln>
-          <a:effectLst/>
         </p:spPr>
         <p:style>
           <a:lnRef idx="1">
@@ -3180,25 +3244,68 @@
           </a:p>
         </p:txBody>
       </p:sp>
+      <p:sp>
+        <p:nvSpPr>
+          <p:cNvPr id="6" name="Rectangle 5"/>
+          <p:cNvSpPr/>
+          <p:nvPr/>
+        </p:nvSpPr>
+        <p:spPr>
+          <a:xfrm>
+            <a:off x="1051560" y="1417320"/>
+            <a:ext cx="6949440" cy="4572000"/>
+          </a:xfrm>
+          <a:prstGeom prst="rect">
+            <a:avLst/>
+          </a:prstGeom>
+          <a:noFill/>
+          <a:ln w="12700">
+            <a:solidFill>
+              <a:srgbClr val="D9DDE3"/>
+            </a:solidFill>
+          </a:ln>
+        </p:spPr>
+        <p:style>
+          <a:lnRef idx="1">
+            <a:schemeClr val="accent1"/>
+          </a:lnRef>
+          <a:fillRef idx="3">
+            <a:schemeClr val="accent1"/>
+          </a:fillRef>
+          <a:effectRef idx="2">
+            <a:schemeClr val="accent1"/>
+          </a:effectRef>
+          <a:fontRef idx="minor">
+            <a:schemeClr val="lt1"/>
+          </a:fontRef>
+        </p:style>
+        <p:txBody>
+          <a:bodyPr rtlCol="0" anchor="ctr"/>
+          <a:lstStyle/>
+          <a:p>
+            <a:pPr algn="ctr"/>
+          </a:p>
+        </p:txBody>
+      </p:sp>
       <p:cxnSp>
         <p:nvCxnSpPr>
-          <p:cNvPr id="4" name="Connector 3"/>
+          <p:cNvPr id="7" name="Connector 6"/>
           <p:cNvCxnSpPr/>
           <p:nvPr/>
         </p:nvCxnSpPr>
         <p:spPr>
-          <a:xfrm flipV="1">
-            <a:off x="6400799" y="868680"/>
-            <a:ext cx="0" cy="5029200"/>
-          </a:xfrm>
-          <a:prstGeom prst="line">
+          <a:xfrm>
+            <a:off x="4526279" y="1417320"/>
+            <a:ext cx="0" cy="4572000"/>
+          </a:xfrm>
+          <a:prstGeom prst="bentConnector3">
             <a:avLst/>
           </a:prstGeom>
           <a:ln w="12700">
             <a:solidFill>
-              <a:srgbClr val="BBBBBB"/>
+              <a:srgbClr val="D9DDE3"/>
             </a:solidFill>
-            <a:prstDash val="dash"/>
+            <a:prstDash val="sysDash"/>
           </a:ln>
         </p:spPr>
         <p:style>
@@ -3218,23 +3325,23 @@
       </p:cxnSp>
       <p:cxnSp>
         <p:nvCxnSpPr>
-          <p:cNvPr id="5" name="Connector 4"/>
+          <p:cNvPr id="8" name="Connector 7"/>
           <p:cNvCxnSpPr/>
           <p:nvPr/>
         </p:nvCxnSpPr>
         <p:spPr>
           <a:xfrm>
-            <a:off x="1417320" y="3383280"/>
-            <a:ext cx="9966960" cy="0"/>
-          </a:xfrm>
-          <a:prstGeom prst="line">
+            <a:off x="1051560" y="3703320"/>
+            <a:ext cx="6949440" cy="0"/>
+          </a:xfrm>
+          <a:prstGeom prst="bentConnector3">
             <a:avLst/>
           </a:prstGeom>
           <a:ln w="12700">
             <a:solidFill>
-              <a:srgbClr val="BBBBBB"/>
+              <a:srgbClr val="D9DDE3"/>
             </a:solidFill>
-            <a:prstDash val="dash"/>
+            <a:prstDash val="sysDash"/>
           </a:ln>
         </p:spPr>
         <p:style>
@@ -3254,14 +3361,14 @@
       </p:cxnSp>
       <p:sp>
         <p:nvSpPr>
-          <p:cNvPr id="6" name="TextBox 5"/>
+          <p:cNvPr id="9" name="TextBox 8"/>
           <p:cNvSpPr txBox="1"/>
           <p:nvPr/>
         </p:nvSpPr>
         <p:spPr>
           <a:xfrm>
-            <a:off x="8366759" y="886968"/>
-            <a:ext cx="2926080" cy="320040"/>
+            <a:off x="4617719" y="1490472"/>
+            <a:ext cx="3291840" cy="274320"/>
           </a:xfrm>
           <a:prstGeom prst="rect">
             <a:avLst/>
@@ -3269,18 +3376,18 @@
           <a:noFill/>
         </p:spPr>
         <p:txBody>
-          <a:bodyPr wrap="square" lIns="0" rIns="0" tIns="0" bIns="0" anchor="ctr">
+          <a:bodyPr wrap="square" lIns="0" rIns="0" tIns="0" bIns="0" anchor="t">
             <a:spAutoFit/>
           </a:bodyPr>
           <a:lstStyle/>
           <a:p>
             <a:pPr algn="r"/>
             <a:r>
-              <a:rPr sz="1300" b="1" i="0">
+              <a:rPr sz="1050" b="1" i="0">
                 <a:solidFill>
-                  <a:srgbClr val="C8102E"/>
+                  <a:srgbClr val="B03030"/>
                 </a:solidFill>
-                <a:latin typeface="Arial"/>
+                <a:latin typeface="Calibri"/>
               </a:rPr>
               <a:t>MOST VULNERABLE</a:t>
             </a:r>
@@ -3289,14 +3396,14 @@
       </p:sp>
       <p:sp>
         <p:nvSpPr>
-          <p:cNvPr id="7" name="TextBox 6"/>
+          <p:cNvPr id="10" name="TextBox 9"/>
           <p:cNvSpPr txBox="1"/>
           <p:nvPr/>
         </p:nvSpPr>
         <p:spPr>
           <a:xfrm>
-            <a:off x="1463040" y="886968"/>
-            <a:ext cx="3474720" cy="320040"/>
+            <a:off x="1143000" y="5660136"/>
+            <a:ext cx="3291839" cy="274320"/>
           </a:xfrm>
           <a:prstGeom prst="rect">
             <a:avLst/>
@@ -3304,34 +3411,34 @@
           <a:noFill/>
         </p:spPr>
         <p:txBody>
-          <a:bodyPr wrap="square" lIns="0" rIns="0" tIns="0" bIns="0" anchor="ctr">
+          <a:bodyPr wrap="square" lIns="0" rIns="0" tIns="0" bIns="0" anchor="t">
             <a:spAutoFit/>
           </a:bodyPr>
           <a:lstStyle/>
           <a:p>
             <a:pPr algn="l"/>
             <a:r>
-              <a:rPr sz="1100" b="0" i="1">
+              <a:rPr sz="1050" b="1" i="0">
                 <a:solidFill>
-                  <a:srgbClr val="555555"/>
+                  <a:srgbClr val="2C6E49"/>
                 </a:solidFill>
-                <a:latin typeface="Arial"/>
+                <a:latin typeface="Calibri"/>
               </a:rPr>
-              <a:t>Fragile, but off El Niño's path</a:t>
-            </a:r>
-          </a:p>
-        </p:txBody>
-      </p:sp>
-      <p:sp>
-        <p:nvSpPr>
-          <p:cNvPr id="8" name="TextBox 7"/>
+              <a:t>MOST INSULATED</a:t>
+            </a:r>
+          </a:p>
+        </p:txBody>
+      </p:sp>
+      <p:sp>
+        <p:nvSpPr>
+          <p:cNvPr id="11" name="TextBox 10"/>
           <p:cNvSpPr txBox="1"/>
           <p:nvPr/>
         </p:nvSpPr>
         <p:spPr>
           <a:xfrm>
-            <a:off x="1463040" y="5559552"/>
-            <a:ext cx="2743200" cy="320040"/>
+            <a:off x="1051560" y="6153912"/>
+            <a:ext cx="6949440" cy="320040"/>
           </a:xfrm>
           <a:prstGeom prst="rect">
             <a:avLst/>
@@ -3339,34 +3446,34 @@
           <a:noFill/>
         </p:spPr>
         <p:txBody>
-          <a:bodyPr wrap="square" lIns="0" rIns="0" tIns="0" bIns="0" anchor="ctr">
+          <a:bodyPr wrap="square" lIns="0" rIns="0" tIns="0" bIns="0" anchor="t">
             <a:spAutoFit/>
           </a:bodyPr>
           <a:lstStyle/>
           <a:p>
-            <a:pPr algn="l"/>
+            <a:pPr algn="ctr"/>
             <a:r>
               <a:rPr sz="1300" b="1" i="0">
                 <a:solidFill>
-                  <a:srgbClr val="2E8B57"/>
+                  <a:srgbClr val="222B3A"/>
                 </a:solidFill>
-                <a:latin typeface="Arial"/>
+                <a:latin typeface="Calibri"/>
               </a:rPr>
-              <a:t>MOST INSULATED</a:t>
-            </a:r>
-          </a:p>
-        </p:txBody>
-      </p:sp>
-      <p:sp>
-        <p:nvSpPr>
-          <p:cNvPr id="9" name="TextBox 8"/>
+              <a:t>El Nino physical exposure  -&gt;</a:t>
+            </a:r>
+          </a:p>
+        </p:txBody>
+      </p:sp>
+      <p:sp>
+        <p:nvSpPr>
+          <p:cNvPr id="12" name="TextBox 11"/>
           <p:cNvSpPr txBox="1"/>
           <p:nvPr/>
         </p:nvSpPr>
         <p:spPr>
-          <a:xfrm>
-            <a:off x="8366759" y="5559552"/>
-            <a:ext cx="2926080" cy="320040"/>
+          <a:xfrm rot="16200000">
+            <a:off x="-1783080" y="3520439"/>
+            <a:ext cx="4572000" cy="365760"/>
           </a:xfrm>
           <a:prstGeom prst="rect">
             <a:avLst/>
@@ -3374,47 +3481,46 @@
           <a:noFill/>
         </p:spPr>
         <p:txBody>
-          <a:bodyPr wrap="square" lIns="0" rIns="0" tIns="0" bIns="0" anchor="ctr">
+          <a:bodyPr wrap="none" lIns="0" rIns="0" tIns="0" bIns="0" anchor="ctr">
             <a:spAutoFit/>
           </a:bodyPr>
           <a:lstStyle/>
           <a:p>
-            <a:pPr algn="r"/>
-            <a:r>
-              <a:rPr sz="1100" b="0" i="1">
+            <a:pPr algn="ctr"/>
+            <a:r>
+              <a:rPr sz="1300" b="1">
                 <a:solidFill>
-                  <a:srgbClr val="555555"/>
+                  <a:srgbClr val="222B3A"/>
                 </a:solidFill>
-                <a:latin typeface="Arial"/>
+                <a:latin typeface="Calibri"/>
               </a:rPr>
-              <a:t>Exposed, but able to absorb</a:t>
-            </a:r>
-          </a:p>
-        </p:txBody>
-      </p:sp>
-      <p:sp>
-        <p:nvSpPr>
-          <p:cNvPr id="10" name="Oval 9"/>
+              <a:t>Fiscal / macro fragility  -&gt;</a:t>
+            </a:r>
+          </a:p>
+        </p:txBody>
+      </p:sp>
+      <p:sp>
+        <p:nvSpPr>
+          <p:cNvPr id="13" name="Oval 12"/>
           <p:cNvSpPr/>
           <p:nvPr/>
         </p:nvSpPr>
         <p:spPr>
           <a:xfrm>
-            <a:off x="9107424" y="1339596"/>
+            <a:off x="7161580" y="3282695"/>
             <a:ext cx="566928" cy="566928"/>
           </a:xfrm>
           <a:prstGeom prst="ellipse">
             <a:avLst/>
           </a:prstGeom>
           <a:solidFill>
-            <a:srgbClr val="CB2228"/>
+            <a:srgbClr val="D76633"/>
           </a:solidFill>
-          <a:ln w="19050">
+          <a:ln w="15875">
             <a:solidFill>
               <a:srgbClr val="FFFFFF"/>
             </a:solidFill>
           </a:ln>
-          <a:effectLst/>
         </p:spPr>
         <p:style>
           <a:lnRef idx="1">
@@ -3440,14 +3546,14 @@
       </p:sp>
       <p:sp>
         <p:nvSpPr>
-          <p:cNvPr id="11" name="TextBox 10"/>
+          <p:cNvPr id="14" name="TextBox 13"/>
           <p:cNvSpPr txBox="1"/>
           <p:nvPr/>
         </p:nvSpPr>
         <p:spPr>
           <a:xfrm>
-            <a:off x="8476488" y="1924812"/>
-            <a:ext cx="1828800" cy="274320"/>
+            <a:off x="6439204" y="3831335"/>
+            <a:ext cx="2011680" cy="256032"/>
           </a:xfrm>
           <a:prstGeom prst="rect">
             <a:avLst/>
@@ -3462,40 +3568,39 @@
           <a:p>
             <a:pPr algn="ctr"/>
             <a:r>
-              <a:rPr sz="1100" b="1" i="0">
+              <a:rPr sz="1100" b="0" i="0">
                 <a:solidFill>
-                  <a:srgbClr val="222222"/>
+                  <a:srgbClr val="222B3A"/>
                 </a:solidFill>
-                <a:latin typeface="Arial"/>
+                <a:latin typeface="Calibri"/>
               </a:rPr>
-              <a:t>Colombia</a:t>
-            </a:r>
-          </a:p>
-        </p:txBody>
-      </p:sp>
-      <p:sp>
-        <p:nvSpPr>
-          <p:cNvPr id="12" name="Oval 11"/>
+              <a:t>Peru</a:t>
+            </a:r>
+          </a:p>
+        </p:txBody>
+      </p:sp>
+      <p:sp>
+        <p:nvSpPr>
+          <p:cNvPr id="15" name="Oval 14"/>
           <p:cNvSpPr/>
           <p:nvPr/>
         </p:nvSpPr>
         <p:spPr>
           <a:xfrm>
-            <a:off x="10104120" y="3099816"/>
+            <a:off x="6536131" y="2002536"/>
             <a:ext cx="566928" cy="566928"/>
           </a:xfrm>
           <a:prstGeom prst="ellipse">
             <a:avLst/>
           </a:prstGeom>
           <a:solidFill>
-            <a:srgbClr val="D34E1C"/>
+            <a:srgbClr val="D66032"/>
           </a:solidFill>
-          <a:ln w="19050">
+          <a:ln w="15875">
             <a:solidFill>
               <a:srgbClr val="FFFFFF"/>
             </a:solidFill>
           </a:ln>
-          <a:effectLst/>
         </p:spPr>
         <p:style>
           <a:lnRef idx="1">
@@ -3521,14 +3626,14 @@
       </p:sp>
       <p:sp>
         <p:nvSpPr>
-          <p:cNvPr id="13" name="TextBox 12"/>
+          <p:cNvPr id="16" name="TextBox 15"/>
           <p:cNvSpPr txBox="1"/>
           <p:nvPr/>
         </p:nvSpPr>
         <p:spPr>
           <a:xfrm>
-            <a:off x="9473184" y="3685031"/>
-            <a:ext cx="1828800" cy="274320"/>
+            <a:off x="5813755" y="2551176"/>
+            <a:ext cx="2011680" cy="256032"/>
           </a:xfrm>
           <a:prstGeom prst="rect">
             <a:avLst/>
@@ -3543,40 +3648,39 @@
           <a:p>
             <a:pPr algn="ctr"/>
             <a:r>
-              <a:rPr sz="1100" b="1" i="0">
+              <a:rPr sz="1100" b="0" i="0">
                 <a:solidFill>
-                  <a:srgbClr val="222222"/>
+                  <a:srgbClr val="222B3A"/>
                 </a:solidFill>
-                <a:latin typeface="Arial"/>
+                <a:latin typeface="Calibri"/>
               </a:rPr>
-              <a:t>Peru</a:t>
-            </a:r>
-          </a:p>
-        </p:txBody>
-      </p:sp>
-      <p:sp>
-        <p:nvSpPr>
-          <p:cNvPr id="14" name="Oval 13"/>
+              <a:t>Colombia</a:t>
+            </a:r>
+          </a:p>
+        </p:txBody>
+      </p:sp>
+      <p:sp>
+        <p:nvSpPr>
+          <p:cNvPr id="17" name="Oval 16"/>
           <p:cNvSpPr/>
           <p:nvPr/>
         </p:nvSpPr>
         <p:spPr>
           <a:xfrm>
-            <a:off x="7313371" y="1591055"/>
+            <a:off x="5493715" y="2505456"/>
             <a:ext cx="566928" cy="566928"/>
           </a:xfrm>
           <a:prstGeom prst="ellipse">
             <a:avLst/>
           </a:prstGeom>
           <a:solidFill>
-            <a:srgbClr val="D97212"/>
+            <a:srgbClr val="E18836"/>
           </a:solidFill>
-          <a:ln w="19050">
+          <a:ln w="15875">
             <a:solidFill>
               <a:srgbClr val="FFFFFF"/>
             </a:solidFill>
           </a:ln>
-          <a:effectLst/>
         </p:spPr>
         <p:style>
           <a:lnRef idx="1">
@@ -3602,14 +3706,14 @@
       </p:sp>
       <p:sp>
         <p:nvSpPr>
-          <p:cNvPr id="15" name="TextBox 14"/>
+          <p:cNvPr id="18" name="TextBox 17"/>
           <p:cNvSpPr txBox="1"/>
           <p:nvPr/>
         </p:nvSpPr>
         <p:spPr>
           <a:xfrm>
-            <a:off x="6682435" y="2176271"/>
-            <a:ext cx="1828800" cy="274320"/>
+            <a:off x="4771339" y="3054096"/>
+            <a:ext cx="2011680" cy="256032"/>
           </a:xfrm>
           <a:prstGeom prst="rect">
             <a:avLst/>
@@ -3624,11 +3728,11 @@
           <a:p>
             <a:pPr algn="ctr"/>
             <a:r>
-              <a:rPr sz="1100" b="1" i="0">
+              <a:rPr sz="1100" b="0" i="0">
                 <a:solidFill>
-                  <a:srgbClr val="222222"/>
+                  <a:srgbClr val="222B3A"/>
                 </a:solidFill>
-                <a:latin typeface="Arial"/>
+                <a:latin typeface="Calibri"/>
               </a:rPr>
               <a:t>Brazil</a:t>
             </a:r>
@@ -3637,27 +3741,26 @@
       </p:sp>
       <p:sp>
         <p:nvSpPr>
-          <p:cNvPr id="16" name="Oval 15"/>
+          <p:cNvPr id="19" name="Oval 18"/>
           <p:cNvSpPr/>
           <p:nvPr/>
         </p:nvSpPr>
         <p:spPr>
           <a:xfrm>
-            <a:off x="3381451" y="1394460"/>
-            <a:ext cx="457200" cy="457200"/>
+            <a:off x="5285232" y="1591055"/>
+            <a:ext cx="566928" cy="566928"/>
           </a:xfrm>
           <a:prstGeom prst="ellipse">
             <a:avLst/>
           </a:prstGeom>
           <a:solidFill>
-            <a:srgbClr val="98A524"/>
+            <a:srgbClr val="DE7D35"/>
           </a:solidFill>
-          <a:ln w="19050">
+          <a:ln w="15875">
             <a:solidFill>
               <a:srgbClr val="FFFFFF"/>
             </a:solidFill>
           </a:ln>
-          <a:effectLst/>
         </p:spPr>
         <p:style>
           <a:lnRef idx="1">
@@ -3683,14 +3786,14 @@
       </p:sp>
       <p:sp>
         <p:nvSpPr>
-          <p:cNvPr id="17" name="TextBox 16"/>
+          <p:cNvPr id="20" name="TextBox 19"/>
           <p:cNvSpPr txBox="1"/>
           <p:nvPr/>
         </p:nvSpPr>
         <p:spPr>
           <a:xfrm>
-            <a:off x="2695651" y="1869948"/>
-            <a:ext cx="1828800" cy="274320"/>
+            <a:off x="4562856" y="2139696"/>
+            <a:ext cx="2011680" cy="256032"/>
           </a:xfrm>
           <a:prstGeom prst="rect">
             <a:avLst/>
@@ -3705,40 +3808,74 @@
           <a:p>
             <a:pPr algn="ctr"/>
             <a:r>
-              <a:rPr sz="1100" b="1" i="0">
+              <a:rPr sz="1100" b="0" i="0">
                 <a:solidFill>
-                  <a:srgbClr val="222222"/>
+                  <a:srgbClr val="222B3A"/>
                 </a:solidFill>
-                <a:latin typeface="Arial"/>
+                <a:latin typeface="Calibri"/>
               </a:rPr>
-              <a:t>Argentina</a:t>
-            </a:r>
-          </a:p>
-        </p:txBody>
-      </p:sp>
-      <p:sp>
-        <p:nvSpPr>
-          <p:cNvPr id="18" name="Oval 17"/>
+              <a:t>Venezuela</a:t>
+            </a:r>
+          </a:p>
+        </p:txBody>
+      </p:sp>
+      <p:sp>
+        <p:nvSpPr>
+          <p:cNvPr id="21" name="TextBox 20"/>
+          <p:cNvSpPr txBox="1"/>
+          <p:nvPr/>
+        </p:nvSpPr>
+        <p:spPr>
+          <a:xfrm>
+            <a:off x="4379976" y="2340864"/>
+            <a:ext cx="2377440" cy="237744"/>
+          </a:xfrm>
+          <a:prstGeom prst="rect">
+            <a:avLst/>
+          </a:prstGeom>
+          <a:noFill/>
+        </p:spPr>
+        <p:txBody>
+          <a:bodyPr wrap="square" lIns="0" rIns="0" tIns="0" bIns="0" anchor="t">
+            <a:spAutoFit/>
+          </a:bodyPr>
+          <a:lstStyle/>
+          <a:p>
+            <a:pPr algn="ctr"/>
+            <a:r>
+              <a:rPr sz="850" b="0" i="1">
+                <a:solidFill>
+                  <a:srgbClr val="6B7280"/>
+                </a:solidFill>
+                <a:latin typeface="Calibri"/>
+              </a:rPr>
+              <a:t>energy shock</a:t>
+            </a:r>
+          </a:p>
+        </p:txBody>
+      </p:sp>
+      <p:sp>
+        <p:nvSpPr>
+          <p:cNvPr id="22" name="Oval 21"/>
           <p:cNvSpPr/>
           <p:nvPr/>
         </p:nvSpPr>
         <p:spPr>
           <a:xfrm>
-            <a:off x="5673851" y="2651760"/>
-            <a:ext cx="457200" cy="457200"/>
+            <a:off x="5771692" y="3236975"/>
+            <a:ext cx="566928" cy="566928"/>
           </a:xfrm>
           <a:prstGeom prst="ellipse">
             <a:avLst/>
           </a:prstGeom>
           <a:solidFill>
-            <a:srgbClr val="B8AC15"/>
+            <a:srgbClr val="E28E37"/>
           </a:solidFill>
-          <a:ln w="19050">
+          <a:ln w="28575">
             <a:solidFill>
-              <a:srgbClr val="FFFFFF"/>
+              <a:srgbClr val="1E2761"/>
             </a:solidFill>
           </a:ln>
-          <a:effectLst/>
         </p:spPr>
         <p:style>
           <a:lnRef idx="1">
@@ -3764,14 +3901,14 @@
       </p:sp>
       <p:sp>
         <p:nvSpPr>
-          <p:cNvPr id="19" name="TextBox 18"/>
+          <p:cNvPr id="23" name="TextBox 22"/>
           <p:cNvSpPr txBox="1"/>
           <p:nvPr/>
         </p:nvSpPr>
         <p:spPr>
           <a:xfrm>
-            <a:off x="4988051" y="3127248"/>
-            <a:ext cx="1828800" cy="274320"/>
+            <a:off x="5049316" y="3785615"/>
+            <a:ext cx="2011680" cy="256032"/>
           </a:xfrm>
           <a:prstGeom prst="rect">
             <a:avLst/>
@@ -3788,9 +3925,9 @@
             <a:r>
               <a:rPr sz="1100" b="1" i="0">
                 <a:solidFill>
-                  <a:srgbClr val="222222"/>
+                  <a:srgbClr val="222B3A"/>
                 </a:solidFill>
-                <a:latin typeface="Arial"/>
+                <a:latin typeface="Calibri"/>
               </a:rPr>
               <a:t>Panama</a:t>
             </a:r>
@@ -3799,27 +3936,61 @@
       </p:sp>
       <p:sp>
         <p:nvSpPr>
-          <p:cNvPr id="20" name="Oval 19"/>
+          <p:cNvPr id="24" name="TextBox 23"/>
+          <p:cNvSpPr txBox="1"/>
+          <p:nvPr/>
+        </p:nvSpPr>
+        <p:spPr>
+          <a:xfrm>
+            <a:off x="4866436" y="3986783"/>
+            <a:ext cx="2377440" cy="237744"/>
+          </a:xfrm>
+          <a:prstGeom prst="rect">
+            <a:avLst/>
+          </a:prstGeom>
+          <a:noFill/>
+        </p:spPr>
+        <p:txBody>
+          <a:bodyPr wrap="square" lIns="0" rIns="0" tIns="0" bIns="0" anchor="t">
+            <a:spAutoFit/>
+          </a:bodyPr>
+          <a:lstStyle/>
+          <a:p>
+            <a:pPr algn="ctr"/>
+            <a:r>
+              <a:rPr sz="850" b="0" i="1">
+                <a:solidFill>
+                  <a:srgbClr val="6B7280"/>
+                </a:solidFill>
+                <a:latin typeface="Calibri"/>
+              </a:rPr>
+              <a:t>canal drought</a:t>
+            </a:r>
+          </a:p>
+        </p:txBody>
+      </p:sp>
+      <p:sp>
+        <p:nvSpPr>
+          <p:cNvPr id="25" name="Oval 24"/>
           <p:cNvSpPr/>
           <p:nvPr/>
         </p:nvSpPr>
         <p:spPr>
           <a:xfrm>
-            <a:off x="6670548" y="1143000"/>
-            <a:ext cx="457200" cy="457200"/>
+            <a:off x="2505456" y="1591055"/>
+            <a:ext cx="566928" cy="566928"/>
           </a:xfrm>
           <a:prstGeom prst="ellipse">
             <a:avLst/>
           </a:prstGeom>
           <a:solidFill>
-            <a:srgbClr val="DA7612"/>
+            <a:srgbClr val="DAB83E"/>
           </a:solidFill>
-          <a:ln w="19050">
+          <a:ln w="15875">
             <a:solidFill>
               <a:srgbClr val="FFFFFF"/>
             </a:solidFill>
           </a:ln>
-          <a:effectLst/>
         </p:spPr>
         <p:style>
           <a:lnRef idx="1">
@@ -3845,14 +4016,14 @@
       </p:sp>
       <p:sp>
         <p:nvSpPr>
-          <p:cNvPr id="21" name="TextBox 20"/>
+          <p:cNvPr id="26" name="TextBox 25"/>
           <p:cNvSpPr txBox="1"/>
           <p:nvPr/>
         </p:nvSpPr>
         <p:spPr>
           <a:xfrm>
-            <a:off x="5984748" y="1618488"/>
-            <a:ext cx="1828800" cy="274320"/>
+            <a:off x="1783079" y="2139696"/>
+            <a:ext cx="2011680" cy="256032"/>
           </a:xfrm>
           <a:prstGeom prst="rect">
             <a:avLst/>
@@ -3867,40 +4038,74 @@
           <a:p>
             <a:pPr algn="ctr"/>
             <a:r>
-              <a:rPr sz="1100" b="1" i="0">
+              <a:rPr sz="1100" b="0" i="0">
                 <a:solidFill>
-                  <a:srgbClr val="222222"/>
+                  <a:srgbClr val="222B3A"/>
                 </a:solidFill>
-                <a:latin typeface="Arial"/>
+                <a:latin typeface="Calibri"/>
               </a:rPr>
-              <a:t>Venezuela</a:t>
-            </a:r>
-          </a:p>
-        </p:txBody>
-      </p:sp>
-      <p:sp>
-        <p:nvSpPr>
-          <p:cNvPr id="22" name="Oval 21"/>
+              <a:t>Argentina</a:t>
+            </a:r>
+          </a:p>
+        </p:txBody>
+      </p:sp>
+      <p:sp>
+        <p:nvSpPr>
+          <p:cNvPr id="27" name="TextBox 26"/>
+          <p:cNvSpPr txBox="1"/>
+          <p:nvPr/>
+        </p:nvSpPr>
+        <p:spPr>
+          <a:xfrm>
+            <a:off x="1600199" y="2340864"/>
+            <a:ext cx="2377440" cy="237744"/>
+          </a:xfrm>
+          <a:prstGeom prst="rect">
+            <a:avLst/>
+          </a:prstGeom>
+          <a:noFill/>
+        </p:spPr>
+        <p:txBody>
+          <a:bodyPr wrap="square" lIns="0" rIns="0" tIns="0" bIns="0" anchor="t">
+            <a:spAutoFit/>
+          </a:bodyPr>
+          <a:lstStyle/>
+          <a:p>
+            <a:pPr algn="ctr"/>
+            <a:r>
+              <a:rPr sz="850" b="0" i="1">
+                <a:solidFill>
+                  <a:srgbClr val="6B7280"/>
+                </a:solidFill>
+                <a:latin typeface="Calibri"/>
+              </a:rPr>
+              <a:t>El Nino helps crops</a:t>
+            </a:r>
+          </a:p>
+        </p:txBody>
+      </p:sp>
+      <p:sp>
+        <p:nvSpPr>
+          <p:cNvPr id="28" name="Oval 27"/>
           <p:cNvSpPr/>
           <p:nvPr/>
         </p:nvSpPr>
         <p:spPr>
           <a:xfrm>
-            <a:off x="4677155" y="2651760"/>
-            <a:ext cx="457200" cy="457200"/>
+            <a:off x="2157984" y="3145536"/>
+            <a:ext cx="566928" cy="566928"/>
           </a:xfrm>
           <a:prstGeom prst="ellipse">
             <a:avLst/>
           </a:prstGeom>
           <a:solidFill>
-            <a:srgbClr val="8FA229"/>
+            <a:srgbClr val="A5AA46"/>
           </a:solidFill>
-          <a:ln w="19050">
+          <a:ln w="15875">
             <a:solidFill>
               <a:srgbClr val="FFFFFF"/>
             </a:solidFill>
           </a:ln>
-          <a:effectLst/>
         </p:spPr>
         <p:style>
           <a:lnRef idx="1">
@@ -3926,14 +4131,14 @@
       </p:sp>
       <p:sp>
         <p:nvSpPr>
-          <p:cNvPr id="23" name="TextBox 22"/>
+          <p:cNvPr id="29" name="TextBox 28"/>
           <p:cNvSpPr txBox="1"/>
           <p:nvPr/>
         </p:nvSpPr>
         <p:spPr>
           <a:xfrm>
-            <a:off x="3991355" y="3127248"/>
-            <a:ext cx="1828800" cy="274320"/>
+            <a:off x="1435607" y="3694176"/>
+            <a:ext cx="2011680" cy="256032"/>
           </a:xfrm>
           <a:prstGeom prst="rect">
             <a:avLst/>
@@ -3948,11 +4153,11 @@
           <a:p>
             <a:pPr algn="ctr"/>
             <a:r>
-              <a:rPr sz="1100" b="1" i="0">
+              <a:rPr sz="1100" b="0" i="0">
                 <a:solidFill>
-                  <a:srgbClr val="222222"/>
+                  <a:srgbClr val="222B3A"/>
                 </a:solidFill>
-                <a:latin typeface="Arial"/>
+                <a:latin typeface="Calibri"/>
               </a:rPr>
               <a:t>Mexico</a:t>
             </a:r>
@@ -3961,27 +4166,26 @@
       </p:sp>
       <p:sp>
         <p:nvSpPr>
-          <p:cNvPr id="24" name="Oval 23"/>
+          <p:cNvPr id="30" name="Oval 29"/>
           <p:cNvSpPr/>
           <p:nvPr/>
         </p:nvSpPr>
         <p:spPr>
           <a:xfrm>
-            <a:off x="5574182" y="3255264"/>
-            <a:ext cx="457200" cy="457200"/>
+            <a:off x="3756355" y="3922776"/>
+            <a:ext cx="566928" cy="566928"/>
           </a:xfrm>
           <a:prstGeom prst="ellipse">
             <a:avLst/>
           </a:prstGeom>
           <a:solidFill>
-            <a:srgbClr val="95A425"/>
+            <a:srgbClr val="D0B540"/>
           </a:solidFill>
-          <a:ln w="19050">
+          <a:ln w="15875">
             <a:solidFill>
               <a:srgbClr val="FFFFFF"/>
             </a:solidFill>
           </a:ln>
-          <a:effectLst/>
         </p:spPr>
         <p:style>
           <a:lnRef idx="1">
@@ -4007,14 +4211,14 @@
       </p:sp>
       <p:sp>
         <p:nvSpPr>
-          <p:cNvPr id="25" name="TextBox 24"/>
+          <p:cNvPr id="31" name="TextBox 30"/>
           <p:cNvSpPr txBox="1"/>
           <p:nvPr/>
         </p:nvSpPr>
         <p:spPr>
           <a:xfrm>
-            <a:off x="4888382" y="3730752"/>
-            <a:ext cx="1828800" cy="274320"/>
+            <a:off x="3033979" y="4471416"/>
+            <a:ext cx="2011680" cy="256032"/>
           </a:xfrm>
           <a:prstGeom prst="rect">
             <a:avLst/>
@@ -4029,40 +4233,267 @@
           <a:p>
             <a:pPr algn="ctr"/>
             <a:r>
+              <a:rPr sz="1100" b="0" i="0">
+                <a:solidFill>
+                  <a:srgbClr val="222B3A"/>
+                </a:solidFill>
+                <a:latin typeface="Calibri"/>
+              </a:rPr>
+              <a:t>Dominican Rep.</a:t>
+            </a:r>
+          </a:p>
+        </p:txBody>
+      </p:sp>
+      <p:sp>
+        <p:nvSpPr>
+          <p:cNvPr id="32" name="Oval 31"/>
+          <p:cNvSpPr/>
+          <p:nvPr/>
+        </p:nvSpPr>
+        <p:spPr>
+          <a:xfrm>
+            <a:off x="2435961" y="4425696"/>
+            <a:ext cx="566928" cy="566928"/>
+          </a:xfrm>
+          <a:prstGeom prst="ellipse">
+            <a:avLst/>
+          </a:prstGeom>
+          <a:solidFill>
+            <a:srgbClr val="8FA449"/>
+          </a:solidFill>
+          <a:ln w="15875">
+            <a:solidFill>
+              <a:srgbClr val="FFFFFF"/>
+            </a:solidFill>
+          </a:ln>
+        </p:spPr>
+        <p:style>
+          <a:lnRef idx="1">
+            <a:schemeClr val="accent1"/>
+          </a:lnRef>
+          <a:fillRef idx="3">
+            <a:schemeClr val="accent1"/>
+          </a:fillRef>
+          <a:effectRef idx="2">
+            <a:schemeClr val="accent1"/>
+          </a:effectRef>
+          <a:fontRef idx="minor">
+            <a:schemeClr val="lt1"/>
+          </a:fontRef>
+        </p:style>
+        <p:txBody>
+          <a:bodyPr rtlCol="0" anchor="ctr"/>
+          <a:lstStyle/>
+          <a:p>
+            <a:pPr algn="ctr"/>
+          </a:p>
+        </p:txBody>
+      </p:sp>
+      <p:sp>
+        <p:nvSpPr>
+          <p:cNvPr id="33" name="TextBox 32"/>
+          <p:cNvSpPr txBox="1"/>
+          <p:nvPr/>
+        </p:nvSpPr>
+        <p:spPr>
+          <a:xfrm>
+            <a:off x="1713585" y="4974336"/>
+            <a:ext cx="2011680" cy="256032"/>
+          </a:xfrm>
+          <a:prstGeom prst="rect">
+            <a:avLst/>
+          </a:prstGeom>
+          <a:noFill/>
+        </p:spPr>
+        <p:txBody>
+          <a:bodyPr wrap="square" lIns="0" rIns="0" tIns="0" bIns="0" anchor="t">
+            <a:spAutoFit/>
+          </a:bodyPr>
+          <a:lstStyle/>
+          <a:p>
+            <a:pPr algn="ctr"/>
+            <a:r>
+              <a:rPr sz="1100" b="0" i="0">
+                <a:solidFill>
+                  <a:srgbClr val="222B3A"/>
+                </a:solidFill>
+                <a:latin typeface="Calibri"/>
+              </a:rPr>
+              <a:t>Chile</a:t>
+            </a:r>
+          </a:p>
+        </p:txBody>
+      </p:sp>
+      <p:sp>
+        <p:nvSpPr>
+          <p:cNvPr id="34" name="Rounded Rectangle 33"/>
+          <p:cNvSpPr/>
+          <p:nvPr/>
+        </p:nvSpPr>
+        <p:spPr>
+          <a:xfrm>
+            <a:off x="8366760" y="1554480"/>
+            <a:ext cx="3291840" cy="2148840"/>
+          </a:xfrm>
+          <a:prstGeom prst="roundRect">
+            <a:avLst/>
+          </a:prstGeom>
+          <a:solidFill>
+            <a:srgbClr val="FFFFFF"/>
+          </a:solidFill>
+          <a:ln w="15875">
+            <a:solidFill>
+              <a:srgbClr val="1E2761"/>
+            </a:solidFill>
+          </a:ln>
+        </p:spPr>
+        <p:style>
+          <a:lnRef idx="1">
+            <a:schemeClr val="accent1"/>
+          </a:lnRef>
+          <a:fillRef idx="3">
+            <a:schemeClr val="accent1"/>
+          </a:fillRef>
+          <a:effectRef idx="2">
+            <a:schemeClr val="accent1"/>
+          </a:effectRef>
+          <a:fontRef idx="minor">
+            <a:schemeClr val="lt1"/>
+          </a:fontRef>
+        </p:style>
+        <p:txBody>
+          <a:bodyPr rtlCol="0" anchor="ctr"/>
+          <a:lstStyle/>
+          <a:p>
+            <a:pPr algn="ctr"/>
+          </a:p>
+        </p:txBody>
+      </p:sp>
+      <p:sp>
+        <p:nvSpPr>
+          <p:cNvPr id="35" name="TextBox 34"/>
+          <p:cNvSpPr txBox="1"/>
+          <p:nvPr/>
+        </p:nvSpPr>
+        <p:spPr>
+          <a:xfrm>
+            <a:off x="8567928" y="1737360"/>
+            <a:ext cx="2926080" cy="320040"/>
+          </a:xfrm>
+          <a:prstGeom prst="rect">
+            <a:avLst/>
+          </a:prstGeom>
+          <a:noFill/>
+        </p:spPr>
+        <p:txBody>
+          <a:bodyPr wrap="square" lIns="0" rIns="0" tIns="0" bIns="0" anchor="t">
+            <a:spAutoFit/>
+          </a:bodyPr>
+          <a:lstStyle/>
+          <a:p>
+            <a:pPr algn="l"/>
+            <a:r>
+              <a:rPr sz="1500" b="1" i="0">
+                <a:solidFill>
+                  <a:srgbClr val="1E2761"/>
+                </a:solidFill>
+                <a:latin typeface="Cambria"/>
+              </a:rPr>
+              <a:t>Focus: Panama</a:t>
+            </a:r>
+          </a:p>
+        </p:txBody>
+      </p:sp>
+      <p:sp>
+        <p:nvSpPr>
+          <p:cNvPr id="36" name="TextBox 35"/>
+          <p:cNvSpPr txBox="1"/>
+          <p:nvPr/>
+        </p:nvSpPr>
+        <p:spPr>
+          <a:xfrm>
+            <a:off x="8567928" y="2121408"/>
+            <a:ext cx="2926080" cy="1463040"/>
+          </a:xfrm>
+          <a:prstGeom prst="rect">
+            <a:avLst/>
+          </a:prstGeom>
+          <a:noFill/>
+        </p:spPr>
+        <p:txBody>
+          <a:bodyPr wrap="square" lIns="0" rIns="0" tIns="0" bIns="0" anchor="t">
+            <a:spAutoFit/>
+          </a:bodyPr>
+          <a:lstStyle/>
+          <a:p>
+            <a:pPr algn="l"/>
+            <a:r>
+              <a:rPr sz="1100" b="0" i="0">
+                <a:solidFill>
+                  <a:srgbClr val="222B3A"/>
+                </a:solidFill>
+                <a:latin typeface="Calibri"/>
+              </a:rPr>
+              <a:t>Canal drought (El Nino cuts Gatun Lake) throttles transits &amp; draft -&gt; a growth drag with fiscal spillover via canal revenue. Dynamic slot pricing / auctions cushion the revenue hit.</a:t>
+            </a:r>
+          </a:p>
+        </p:txBody>
+      </p:sp>
+      <p:sp>
+        <p:nvSpPr>
+          <p:cNvPr id="37" name="TextBox 36"/>
+          <p:cNvSpPr txBox="1"/>
+          <p:nvPr/>
+        </p:nvSpPr>
+        <p:spPr>
+          <a:xfrm>
+            <a:off x="8366760" y="3977639"/>
+            <a:ext cx="3291840" cy="274320"/>
+          </a:xfrm>
+          <a:prstGeom prst="rect">
+            <a:avLst/>
+          </a:prstGeom>
+          <a:noFill/>
+        </p:spPr>
+        <p:txBody>
+          <a:bodyPr wrap="square" lIns="0" rIns="0" tIns="0" bIns="0" anchor="t">
+            <a:spAutoFit/>
+          </a:bodyPr>
+          <a:lstStyle/>
+          <a:p>
+            <a:pPr algn="l"/>
+            <a:r>
               <a:rPr sz="1100" b="1" i="0">
                 <a:solidFill>
-                  <a:srgbClr val="222222"/>
+                  <a:srgbClr val="6B7280"/>
                 </a:solidFill>
-                <a:latin typeface="Arial"/>
+                <a:latin typeface="Calibri"/>
               </a:rPr>
-              <a:t>Dom. Rep.</a:t>
-            </a:r>
-          </a:p>
-        </p:txBody>
-      </p:sp>
-      <p:sp>
-        <p:nvSpPr>
-          <p:cNvPr id="26" name="Oval 25"/>
+              <a:t>Overall El Nino risk</a:t>
+            </a:r>
+          </a:p>
+        </p:txBody>
+      </p:sp>
+      <p:sp>
+        <p:nvSpPr>
+          <p:cNvPr id="38" name="Rectangle 37"/>
           <p:cNvSpPr/>
           <p:nvPr/>
         </p:nvSpPr>
         <p:spPr>
           <a:xfrm>
-            <a:off x="4178807" y="4160520"/>
-            <a:ext cx="457200" cy="457200"/>
-          </a:xfrm>
-          <a:prstGeom prst="ellipse">
+            <a:off x="8366760" y="4279392"/>
+            <a:ext cx="487680" cy="201168"/>
+          </a:xfrm>
+          <a:prstGeom prst="rect">
             <a:avLst/>
           </a:prstGeom>
           <a:solidFill>
             <a:srgbClr val="2E8B57"/>
           </a:solidFill>
-          <a:ln w="19050">
-            <a:solidFill>
-              <a:srgbClr val="FFFFFF"/>
-            </a:solidFill>
+          <a:ln>
+            <a:noFill/>
           </a:ln>
-          <a:effectLst/>
         </p:spPr>
         <p:style>
           <a:lnRef idx="1">
@@ -4088,14 +4519,229 @@
       </p:sp>
       <p:sp>
         <p:nvSpPr>
-          <p:cNvPr id="27" name="TextBox 26"/>
+          <p:cNvPr id="39" name="Rectangle 38"/>
+          <p:cNvSpPr/>
+          <p:nvPr/>
+        </p:nvSpPr>
+        <p:spPr>
+          <a:xfrm>
+            <a:off x="8854440" y="4279392"/>
+            <a:ext cx="487680" cy="201168"/>
+          </a:xfrm>
+          <a:prstGeom prst="rect">
+            <a:avLst/>
+          </a:prstGeom>
+          <a:solidFill>
+            <a:srgbClr val="7B9F4C"/>
+          </a:solidFill>
+          <a:ln>
+            <a:noFill/>
+          </a:ln>
+        </p:spPr>
+        <p:style>
+          <a:lnRef idx="1">
+            <a:schemeClr val="accent1"/>
+          </a:lnRef>
+          <a:fillRef idx="3">
+            <a:schemeClr val="accent1"/>
+          </a:fillRef>
+          <a:effectRef idx="2">
+            <a:schemeClr val="accent1"/>
+          </a:effectRef>
+          <a:fontRef idx="minor">
+            <a:schemeClr val="lt1"/>
+          </a:fontRef>
+        </p:style>
+        <p:txBody>
+          <a:bodyPr rtlCol="0" anchor="ctr"/>
+          <a:lstStyle/>
+          <a:p>
+            <a:pPr algn="ctr"/>
+          </a:p>
+        </p:txBody>
+      </p:sp>
+      <p:sp>
+        <p:nvSpPr>
+          <p:cNvPr id="40" name="Rectangle 39"/>
+          <p:cNvSpPr/>
+          <p:nvPr/>
+        </p:nvSpPr>
+        <p:spPr>
+          <a:xfrm>
+            <a:off x="9342120" y="4279392"/>
+            <a:ext cx="487680" cy="201168"/>
+          </a:xfrm>
+          <a:prstGeom prst="rect">
+            <a:avLst/>
+          </a:prstGeom>
+          <a:solidFill>
+            <a:srgbClr val="C9B341"/>
+          </a:solidFill>
+          <a:ln>
+            <a:noFill/>
+          </a:ln>
+        </p:spPr>
+        <p:style>
+          <a:lnRef idx="1">
+            <a:schemeClr val="accent1"/>
+          </a:lnRef>
+          <a:fillRef idx="3">
+            <a:schemeClr val="accent1"/>
+          </a:fillRef>
+          <a:effectRef idx="2">
+            <a:schemeClr val="accent1"/>
+          </a:effectRef>
+          <a:fontRef idx="minor">
+            <a:schemeClr val="lt1"/>
+          </a:fontRef>
+        </p:style>
+        <p:txBody>
+          <a:bodyPr rtlCol="0" anchor="ctr"/>
+          <a:lstStyle/>
+          <a:p>
+            <a:pPr algn="ctr"/>
+          </a:p>
+        </p:txBody>
+      </p:sp>
+      <p:sp>
+        <p:nvSpPr>
+          <p:cNvPr id="41" name="Rectangle 40"/>
+          <p:cNvSpPr/>
+          <p:nvPr/>
+        </p:nvSpPr>
+        <p:spPr>
+          <a:xfrm>
+            <a:off x="9829800" y="4279392"/>
+            <a:ext cx="487680" cy="201168"/>
+          </a:xfrm>
+          <a:prstGeom prst="rect">
+            <a:avLst/>
+          </a:prstGeom>
+          <a:solidFill>
+            <a:srgbClr val="E8A139"/>
+          </a:solidFill>
+          <a:ln>
+            <a:noFill/>
+          </a:ln>
+        </p:spPr>
+        <p:style>
+          <a:lnRef idx="1">
+            <a:schemeClr val="accent1"/>
+          </a:lnRef>
+          <a:fillRef idx="3">
+            <a:schemeClr val="accent1"/>
+          </a:fillRef>
+          <a:effectRef idx="2">
+            <a:schemeClr val="accent1"/>
+          </a:effectRef>
+          <a:fontRef idx="minor">
+            <a:schemeClr val="lt1"/>
+          </a:fontRef>
+        </p:style>
+        <p:txBody>
+          <a:bodyPr rtlCol="0" anchor="ctr"/>
+          <a:lstStyle/>
+          <a:p>
+            <a:pPr algn="ctr"/>
+          </a:p>
+        </p:txBody>
+      </p:sp>
+      <p:sp>
+        <p:nvSpPr>
+          <p:cNvPr id="42" name="Rectangle 41"/>
+          <p:cNvSpPr/>
+          <p:nvPr/>
+        </p:nvSpPr>
+        <p:spPr>
+          <a:xfrm>
+            <a:off x="10317480" y="4279392"/>
+            <a:ext cx="487680" cy="201168"/>
+          </a:xfrm>
+          <a:prstGeom prst="rect">
+            <a:avLst/>
+          </a:prstGeom>
+          <a:solidFill>
+            <a:srgbClr val="D86733"/>
+          </a:solidFill>
+          <a:ln>
+            <a:noFill/>
+          </a:ln>
+        </p:spPr>
+        <p:style>
+          <a:lnRef idx="1">
+            <a:schemeClr val="accent1"/>
+          </a:lnRef>
+          <a:fillRef idx="3">
+            <a:schemeClr val="accent1"/>
+          </a:fillRef>
+          <a:effectRef idx="2">
+            <a:schemeClr val="accent1"/>
+          </a:effectRef>
+          <a:fontRef idx="minor">
+            <a:schemeClr val="lt1"/>
+          </a:fontRef>
+        </p:style>
+        <p:txBody>
+          <a:bodyPr rtlCol="0" anchor="ctr"/>
+          <a:lstStyle/>
+          <a:p>
+            <a:pPr algn="ctr"/>
+          </a:p>
+        </p:txBody>
+      </p:sp>
+      <p:sp>
+        <p:nvSpPr>
+          <p:cNvPr id="43" name="Rectangle 42"/>
+          <p:cNvSpPr/>
+          <p:nvPr/>
+        </p:nvSpPr>
+        <p:spPr>
+          <a:xfrm>
+            <a:off x="10805160" y="4279392"/>
+            <a:ext cx="487680" cy="201168"/>
+          </a:xfrm>
+          <a:prstGeom prst="rect">
+            <a:avLst/>
+          </a:prstGeom>
+          <a:solidFill>
+            <a:srgbClr val="C82E2E"/>
+          </a:solidFill>
+          <a:ln>
+            <a:noFill/>
+          </a:ln>
+        </p:spPr>
+        <p:style>
+          <a:lnRef idx="1">
+            <a:schemeClr val="accent1"/>
+          </a:lnRef>
+          <a:fillRef idx="3">
+            <a:schemeClr val="accent1"/>
+          </a:fillRef>
+          <a:effectRef idx="2">
+            <a:schemeClr val="accent1"/>
+          </a:effectRef>
+          <a:fontRef idx="minor">
+            <a:schemeClr val="lt1"/>
+          </a:fontRef>
+        </p:style>
+        <p:txBody>
+          <a:bodyPr rtlCol="0" anchor="ctr"/>
+          <a:lstStyle/>
+          <a:p>
+            <a:pPr algn="ctr"/>
+          </a:p>
+        </p:txBody>
+      </p:sp>
+      <p:sp>
+        <p:nvSpPr>
+          <p:cNvPr id="44" name="TextBox 43"/>
           <p:cNvSpPr txBox="1"/>
           <p:nvPr/>
         </p:nvSpPr>
         <p:spPr>
           <a:xfrm>
-            <a:off x="3493007" y="4636007"/>
-            <a:ext cx="1828800" cy="274320"/>
+            <a:off x="8366760" y="4517136"/>
+            <a:ext cx="1371600" cy="228600"/>
           </a:xfrm>
           <a:prstGeom prst="rect">
             <a:avLst/>
@@ -4108,29 +4754,29 @@
           </a:bodyPr>
           <a:lstStyle/>
           <a:p>
-            <a:pPr algn="ctr"/>
-            <a:r>
-              <a:rPr sz="1100" b="1" i="0">
+            <a:pPr algn="l"/>
+            <a:r>
+              <a:rPr sz="900" b="0" i="0">
                 <a:solidFill>
-                  <a:srgbClr val="222222"/>
+                  <a:srgbClr val="6B7280"/>
                 </a:solidFill>
-                <a:latin typeface="Arial"/>
+                <a:latin typeface="Calibri"/>
               </a:rPr>
-              <a:t>Chile</a:t>
-            </a:r>
-          </a:p>
-        </p:txBody>
-      </p:sp>
-      <p:sp>
-        <p:nvSpPr>
-          <p:cNvPr id="28" name="TextBox 27"/>
+              <a:t>lower</a:t>
+            </a:r>
+          </a:p>
+        </p:txBody>
+      </p:sp>
+      <p:sp>
+        <p:nvSpPr>
+          <p:cNvPr id="45" name="TextBox 44"/>
           <p:cNvSpPr txBox="1"/>
           <p:nvPr/>
         </p:nvSpPr>
         <p:spPr>
           <a:xfrm>
-            <a:off x="1371600" y="5943600"/>
-            <a:ext cx="1097280" cy="274320"/>
+            <a:off x="10104120" y="4517136"/>
+            <a:ext cx="1188720" cy="228600"/>
           </a:xfrm>
           <a:prstGeom prst="rect">
             <a:avLst/>
@@ -4143,29 +4789,29 @@
           </a:bodyPr>
           <a:lstStyle/>
           <a:p>
-            <a:pPr algn="l"/>
-            <a:r>
-              <a:rPr sz="1100" b="0" i="0">
+            <a:pPr algn="r"/>
+            <a:r>
+              <a:rPr sz="900" b="0" i="0">
                 <a:solidFill>
-                  <a:srgbClr val="555555"/>
+                  <a:srgbClr val="6B7280"/>
                 </a:solidFill>
-                <a:latin typeface="Arial"/>
+                <a:latin typeface="Calibri"/>
               </a:rPr>
-              <a:t>Low</a:t>
-            </a:r>
-          </a:p>
-        </p:txBody>
-      </p:sp>
-      <p:sp>
-        <p:nvSpPr>
-          <p:cNvPr id="29" name="TextBox 28"/>
+              <a:t>higher</a:t>
+            </a:r>
+          </a:p>
+        </p:txBody>
+      </p:sp>
+      <p:sp>
+        <p:nvSpPr>
+          <p:cNvPr id="46" name="TextBox 45"/>
           <p:cNvSpPr txBox="1"/>
           <p:nvPr/>
         </p:nvSpPr>
         <p:spPr>
           <a:xfrm>
-            <a:off x="10332719" y="5943600"/>
-            <a:ext cx="1097280" cy="274320"/>
+            <a:off x="502920" y="6455664"/>
+            <a:ext cx="11155680" cy="274320"/>
           </a:xfrm>
           <a:prstGeom prst="rect">
             <a:avLst/>
@@ -4178,155 +4824,15 @@
           </a:bodyPr>
           <a:lstStyle/>
           <a:p>
-            <a:pPr algn="r"/>
-            <a:r>
-              <a:rPr sz="1100" b="0" i="0">
+            <a:pPr algn="l"/>
+            <a:r>
+              <a:rPr sz="900" b="0" i="1">
                 <a:solidFill>
-                  <a:srgbClr val="555555"/>
+                  <a:srgbClr val="6B7280"/>
                 </a:solidFill>
-                <a:latin typeface="Arial"/>
+                <a:latin typeface="Calibri"/>
               </a:rPr>
-              <a:t>High</a:t>
-            </a:r>
-          </a:p>
-        </p:txBody>
-      </p:sp>
-      <p:sp>
-        <p:nvSpPr>
-          <p:cNvPr id="30" name="TextBox 29"/>
-          <p:cNvSpPr txBox="1"/>
-          <p:nvPr/>
-        </p:nvSpPr>
-        <p:spPr>
-          <a:xfrm>
-            <a:off x="4571999" y="6281928"/>
-            <a:ext cx="3657600" cy="320040"/>
-          </a:xfrm>
-          <a:prstGeom prst="rect">
-            <a:avLst/>
-          </a:prstGeom>
-          <a:noFill/>
-        </p:spPr>
-        <p:txBody>
-          <a:bodyPr wrap="square" lIns="0" rIns="0" tIns="0" bIns="0" anchor="ctr">
-            <a:spAutoFit/>
-          </a:bodyPr>
-          <a:lstStyle/>
-          <a:p>
-            <a:pPr algn="ctr"/>
-            <a:r>
-              <a:rPr sz="1250" b="0" i="0">
-                <a:solidFill>
-                  <a:srgbClr val="222222"/>
-                </a:solidFill>
-                <a:latin typeface="Arial"/>
-              </a:rPr>
-              <a:t>El Niño physical exposure  →</a:t>
-            </a:r>
-          </a:p>
-        </p:txBody>
-      </p:sp>
-      <p:sp>
-        <p:nvSpPr>
-          <p:cNvPr id="31" name="TextBox 30"/>
-          <p:cNvSpPr txBox="1"/>
-          <p:nvPr/>
-        </p:nvSpPr>
-        <p:spPr>
-          <a:xfrm rot="16200000">
-            <a:off x="457200" y="850392"/>
-            <a:ext cx="1097280" cy="274320"/>
-          </a:xfrm>
-          <a:prstGeom prst="rect">
-            <a:avLst/>
-          </a:prstGeom>
-          <a:noFill/>
-        </p:spPr>
-        <p:txBody>
-          <a:bodyPr wrap="square" lIns="0" rIns="0" tIns="0" bIns="0" anchor="ctr">
-            <a:spAutoFit/>
-          </a:bodyPr>
-          <a:lstStyle/>
-          <a:p>
-            <a:pPr algn="ctr"/>
-            <a:r>
-              <a:rPr sz="1100" b="0" i="0">
-                <a:solidFill>
-                  <a:srgbClr val="555555"/>
-                </a:solidFill>
-                <a:latin typeface="Arial"/>
-              </a:rPr>
-              <a:t>Fragile</a:t>
-            </a:r>
-          </a:p>
-        </p:txBody>
-      </p:sp>
-      <p:sp>
-        <p:nvSpPr>
-          <p:cNvPr id="32" name="TextBox 31"/>
-          <p:cNvSpPr txBox="1"/>
-          <p:nvPr/>
-        </p:nvSpPr>
-        <p:spPr>
-          <a:xfrm rot="16200000">
-            <a:off x="457200" y="5641848"/>
-            <a:ext cx="1097280" cy="274320"/>
-          </a:xfrm>
-          <a:prstGeom prst="rect">
-            <a:avLst/>
-          </a:prstGeom>
-          <a:noFill/>
-        </p:spPr>
-        <p:txBody>
-          <a:bodyPr wrap="square" lIns="0" rIns="0" tIns="0" bIns="0" anchor="ctr">
-            <a:spAutoFit/>
-          </a:bodyPr>
-          <a:lstStyle/>
-          <a:p>
-            <a:pPr algn="ctr"/>
-            <a:r>
-              <a:rPr sz="1100" b="0" i="0">
-                <a:solidFill>
-                  <a:srgbClr val="555555"/>
-                </a:solidFill>
-                <a:latin typeface="Arial"/>
-              </a:rPr>
-              <a:t>Resilient</a:t>
-            </a:r>
-          </a:p>
-        </p:txBody>
-      </p:sp>
-      <p:sp>
-        <p:nvSpPr>
-          <p:cNvPr id="33" name="TextBox 32"/>
-          <p:cNvSpPr txBox="1"/>
-          <p:nvPr/>
-        </p:nvSpPr>
-        <p:spPr>
-          <a:xfrm rot="16200000">
-            <a:off x="182879" y="2011680"/>
-            <a:ext cx="2743200" cy="320040"/>
-          </a:xfrm>
-          <a:prstGeom prst="rect">
-            <a:avLst/>
-          </a:prstGeom>
-          <a:noFill/>
-        </p:spPr>
-        <p:txBody>
-          <a:bodyPr wrap="square" lIns="0" rIns="0" tIns="0" bIns="0" anchor="ctr">
-            <a:spAutoFit/>
-          </a:bodyPr>
-          <a:lstStyle/>
-          <a:p>
-            <a:pPr algn="ctr"/>
-            <a:r>
-              <a:rPr sz="1250" b="0" i="0">
-                <a:solidFill>
-                  <a:srgbClr val="222222"/>
-                </a:solidFill>
-                <a:latin typeface="Arial"/>
-              </a:rPr>
-              <a:t>Fiscal / macro fragility  →</a:t>
+              <a:t>Positions are UBS desk estimates. El Nino declared by NOAA Jun 2026; Panama Canal Authority cut Neopanamax draft limits from Jul 2026. Sources: BBVA Research, IMF, Oxford Economics, ACP.</a:t>
             </a:r>
           </a:p>
         </p:txBody>
